--- a/presentations/04_reading_raw_data.pptx
+++ b/presentations/04_reading_raw_data.pptx
@@ -2170,7 +2170,7 @@
             <a:r>
               <a:rPr lang="en-US" sz="1200" i="1" dirty="0">
                 <a:solidFill>
-                  <a:srgbClr val="5A7682"/>
+                  <a:srgbClr val="8FAEB8"/>
                 </a:solidFill>
                 <a:latin typeface="Calibri" pitchFamily="34" charset="0"/>
                 <a:ea typeface="Calibri" pitchFamily="34" charset="-122"/>
@@ -12733,7 +12733,7 @@
                 <a:ea typeface="Calibri" pitchFamily="34" charset="-122"/>
                 <a:cs typeface="Calibri" pitchFamily="34" charset="-120"/>
               </a:rPr>
-              <a:t>Two dangers.  </a:t>
+              <a:t>Three dangers.  </a:t>
             </a:r>
             <a:pPr indent="0" marL="0">
               <a:lnSpc>

--- a/presentations/04_reading_raw_data.pptx
+++ b/presentations/04_reading_raw_data.pptx
@@ -9282,7 +9282,7 @@
                           <a:ea typeface="Courier New" pitchFamily="34" charset="-122"/>
                           <a:cs typeface="Courier New" pitchFamily="34" charset="-120"/>
                         </a:rPr>
-                        <a:t>9</a:t>
+                        <a:t>10</a:t>
                       </a:r>
                       <a:endParaRPr lang="en-US" sz="1250" dirty="0">
                         <a:latin typeface="Courier New" charset="0"/>
